--- a/assets/pptx/catalog-793.pptx
+++ b/assets/pptx/catalog-793.pptx
@@ -3330,7 +3330,7 @@
                 <a:ea typeface="Ebrima"/>
                 <a:cs typeface="Ebrima"/>
               </a:rPr>
-              <a:t>(3x)</a:t>
+              <a:t>3x</a:t>
             </a:r>
           </a:p>
         </p:txBody>
@@ -4134,7 +4134,7 @@
                 <a:ea typeface="Ebrima"/>
                 <a:cs typeface="Ebrima"/>
               </a:rPr>
-              <a:t>(3x)</a:t>
+              <a:t>3x</a:t>
             </a:r>
           </a:p>
         </p:txBody>
@@ -4335,7 +4335,7 @@
                 <a:ea typeface="Ebrima"/>
                 <a:cs typeface="Ebrima"/>
               </a:rPr>
-              <a:t>እግዚአብሔር ሆኖልኝ ሞገስ (2x)</a:t>
+              <a:t>እግዚአብሔር ሆኖልኝ ሞገስ 2x</a:t>
             </a:r>
           </a:p>
         </p:txBody>
